--- a/catalog/samples/ranked_bar_annotated.pptx
+++ b/catalog/samples/ranked_bar_annotated.pptx
@@ -6843,7 +6843,7 @@
           </a:p>
           <a:p>
             <a:r>
-              <a:t>  "template_sha256": "6cee483c311374e2650baacd304e7dc62e426c730c36844c654782b32f0edb11"</a:t>
+              <a:t>  "template_sha256": "56c95645ddd5fabf0b9600f5425ebe99a2072d0d0b4988560e57ed12434c5f40"</a:t>
             </a:r>
           </a:p>
           <a:p>
